--- a/Replication Project/Incentives and COVID-19 Vaccinations Replication Project ppt.pptx
+++ b/Replication Project/Incentives and COVID-19 Vaccinations Replication Project ppt.pptx
@@ -122,12 +122,25 @@
 </p:presentation>
 </file>
 
-<file path=ppt/revisionInfo.xml><?xml version="1.0" encoding="utf-8"?>
-<p1510:revInfo xmlns:a="http://schemas.openxmlformats.org/drawingml/2006/main" xmlns:r="http://schemas.openxmlformats.org/officeDocument/2006/relationships" xmlns:p1510="http://schemas.microsoft.com/office/powerpoint/2015/10/main">
-  <p1510:revLst>
-    <p1510:client id="{C7BE2EF1-764B-4A79-BD19-C638061B3F93}" v="40" dt="2026-03-20T13:07:43.512"/>
-  </p1510:revLst>
-</p1510:revInfo>
+<file path=ppt/changesInfos/changesInfo1.xml><?xml version="1.0" encoding="utf-8"?>
+<pc:chgInfo xmlns:a="http://schemas.openxmlformats.org/drawingml/2006/main" xmlns:r="http://schemas.openxmlformats.org/officeDocument/2006/relationships" xmlns:ac="http://schemas.microsoft.com/office/drawing/2013/main/command" xmlns:pc="http://schemas.microsoft.com/office/powerpoint/2013/main/command">
+  <pc:docChgLst>
+    <pc:chgData name="Alan Alvarado" userId="517dc779ebbddcdf" providerId="LiveId" clId="{39E8B4CE-5C0D-480A-8585-284C13672A74}"/>
+    <pc:docChg chg="modSld sldOrd">
+      <pc:chgData name="Alan Alvarado" userId="517dc779ebbddcdf" providerId="LiveId" clId="{39E8B4CE-5C0D-480A-8585-284C13672A74}" dt="2026-04-01T10:33:03.828" v="1"/>
+      <pc:docMkLst>
+        <pc:docMk/>
+      </pc:docMkLst>
+      <pc:sldChg chg="ord">
+        <pc:chgData name="Alan Alvarado" userId="517dc779ebbddcdf" providerId="LiveId" clId="{39E8B4CE-5C0D-480A-8585-284C13672A74}" dt="2026-04-01T10:33:03.828" v="1"/>
+        <pc:sldMkLst>
+          <pc:docMk/>
+          <pc:sldMk cId="0" sldId="257"/>
+        </pc:sldMkLst>
+      </pc:sldChg>
+    </pc:docChg>
+  </pc:docChgLst>
+</pc:chgInfo>
 </file>
 
 <file path=ppt/notesMasters/notesMaster1.xml><?xml version="1.0" encoding="utf-8"?>

--- a/Replication Project/Incentives and COVID-19 Vaccinations Replication Project ppt.pptx
+++ b/Replication Project/Incentives and COVID-19 Vaccinations Replication Project ppt.pptx
@@ -18,7 +18,7 @@
     <p:sldId id="268" r:id="rId9"/>
     <p:sldId id="269" r:id="rId10"/>
     <p:sldId id="262" r:id="rId11"/>
-    <p:sldId id="263" r:id="rId12"/>
+    <p:sldId id="270" r:id="rId12"/>
   </p:sldIdLst>
   <p:sldSz cx="12192000" cy="6858000"/>
   <p:notesSz cx="6858000" cy="12192000"/>
@@ -122,21 +122,168 @@
 </p:presentation>
 </file>
 
+<file path=ppt/revisionInfo.xml><?xml version="1.0" encoding="utf-8"?>
+<p1510:revInfo xmlns:a="http://schemas.openxmlformats.org/drawingml/2006/main" xmlns:r="http://schemas.openxmlformats.org/officeDocument/2006/relationships" xmlns:p1510="http://schemas.microsoft.com/office/powerpoint/2015/10/main">
+  <p1510:revLst>
+    <p1510:client id="{398FBF38-EE32-42C5-91C2-13DA8AA56A46}" v="24" dt="2026-04-02T10:20:47.597"/>
+  </p1510:revLst>
+</p1510:revInfo>
+</file>
+
 <file path=ppt/changesInfos/changesInfo1.xml><?xml version="1.0" encoding="utf-8"?>
 <pc:chgInfo xmlns:a="http://schemas.openxmlformats.org/drawingml/2006/main" xmlns:r="http://schemas.openxmlformats.org/officeDocument/2006/relationships" xmlns:ac="http://schemas.microsoft.com/office/drawing/2013/main/command" xmlns:pc="http://schemas.microsoft.com/office/powerpoint/2013/main/command">
   <pc:docChgLst>
     <pc:chgData name="Alan Alvarado" userId="517dc779ebbddcdf" providerId="LiveId" clId="{39E8B4CE-5C0D-480A-8585-284C13672A74}"/>
-    <pc:docChg chg="modSld sldOrd">
-      <pc:chgData name="Alan Alvarado" userId="517dc779ebbddcdf" providerId="LiveId" clId="{39E8B4CE-5C0D-480A-8585-284C13672A74}" dt="2026-04-01T10:33:03.828" v="1"/>
+    <pc:docChg chg="custSel addSld delSld modSld sldOrd">
+      <pc:chgData name="Alan Alvarado" userId="517dc779ebbddcdf" providerId="LiveId" clId="{39E8B4CE-5C0D-480A-8585-284C13672A74}" dt="2026-04-02T10:23:19.127" v="227" actId="20577"/>
       <pc:docMkLst>
         <pc:docMk/>
       </pc:docMkLst>
-      <pc:sldChg chg="ord">
-        <pc:chgData name="Alan Alvarado" userId="517dc779ebbddcdf" providerId="LiveId" clId="{39E8B4CE-5C0D-480A-8585-284C13672A74}" dt="2026-04-01T10:33:03.828" v="1"/>
+      <pc:sldChg chg="modSp mod ord">
+        <pc:chgData name="Alan Alvarado" userId="517dc779ebbddcdf" providerId="LiveId" clId="{39E8B4CE-5C0D-480A-8585-284C13672A74}" dt="2026-04-02T08:15:10.147" v="28" actId="20577"/>
         <pc:sldMkLst>
           <pc:docMk/>
           <pc:sldMk cId="0" sldId="257"/>
         </pc:sldMkLst>
+        <pc:spChg chg="mod">
+          <ac:chgData name="Alan Alvarado" userId="517dc779ebbddcdf" providerId="LiveId" clId="{39E8B4CE-5C0D-480A-8585-284C13672A74}" dt="2026-04-02T08:15:10.147" v="28" actId="20577"/>
+          <ac:spMkLst>
+            <pc:docMk/>
+            <pc:sldMk cId="0" sldId="257"/>
+            <ac:spMk id="8" creationId="{00000000-0000-0000-0000-000000000000}"/>
+          </ac:spMkLst>
+        </pc:spChg>
+        <pc:picChg chg="mod">
+          <ac:chgData name="Alan Alvarado" userId="517dc779ebbddcdf" providerId="LiveId" clId="{39E8B4CE-5C0D-480A-8585-284C13672A74}" dt="2026-04-02T08:15:08.752" v="26" actId="1076"/>
+          <ac:picMkLst>
+            <pc:docMk/>
+            <pc:sldMk cId="0" sldId="257"/>
+            <ac:picMk id="2" creationId="{00000000-0000-0000-0000-000000000000}"/>
+          </ac:picMkLst>
+        </pc:picChg>
+      </pc:sldChg>
+      <pc:sldChg chg="addSp delSp modSp mod">
+        <pc:chgData name="Alan Alvarado" userId="517dc779ebbddcdf" providerId="LiveId" clId="{39E8B4CE-5C0D-480A-8585-284C13672A74}" dt="2026-04-02T09:31:11.988" v="36" actId="1076"/>
+        <pc:sldMkLst>
+          <pc:docMk/>
+          <pc:sldMk cId="0" sldId="259"/>
+        </pc:sldMkLst>
+        <pc:picChg chg="add mod">
+          <ac:chgData name="Alan Alvarado" userId="517dc779ebbddcdf" providerId="LiveId" clId="{39E8B4CE-5C0D-480A-8585-284C13672A74}" dt="2026-04-02T09:31:11.988" v="36" actId="1076"/>
+          <ac:picMkLst>
+            <pc:docMk/>
+            <pc:sldMk cId="0" sldId="259"/>
+            <ac:picMk id="6" creationId="{F00C472A-0DE9-BCEE-1B1A-E45057E37189}"/>
+          </ac:picMkLst>
+        </pc:picChg>
+        <pc:picChg chg="del mod">
+          <ac:chgData name="Alan Alvarado" userId="517dc779ebbddcdf" providerId="LiveId" clId="{39E8B4CE-5C0D-480A-8585-284C13672A74}" dt="2026-04-02T09:30:49.276" v="31" actId="478"/>
+          <ac:picMkLst>
+            <pc:docMk/>
+            <pc:sldMk cId="0" sldId="259"/>
+            <ac:picMk id="9" creationId="{BA7DAE05-EE5D-D908-F59D-448562A44209}"/>
+          </ac:picMkLst>
+        </pc:picChg>
+      </pc:sldChg>
+      <pc:sldChg chg="addSp delSp modSp mod">
+        <pc:chgData name="Alan Alvarado" userId="517dc779ebbddcdf" providerId="LiveId" clId="{39E8B4CE-5C0D-480A-8585-284C13672A74}" dt="2026-04-02T09:35:39.470" v="45" actId="1076"/>
+        <pc:sldMkLst>
+          <pc:docMk/>
+          <pc:sldMk cId="0" sldId="260"/>
+        </pc:sldMkLst>
+        <pc:picChg chg="del">
+          <ac:chgData name="Alan Alvarado" userId="517dc779ebbddcdf" providerId="LiveId" clId="{39E8B4CE-5C0D-480A-8585-284C13672A74}" dt="2026-04-02T09:35:11.140" v="37" actId="478"/>
+          <ac:picMkLst>
+            <pc:docMk/>
+            <pc:sldMk cId="0" sldId="260"/>
+            <ac:picMk id="3" creationId="{00000000-0000-0000-0000-000000000000}"/>
+          </ac:picMkLst>
+        </pc:picChg>
+        <pc:picChg chg="add mod">
+          <ac:chgData name="Alan Alvarado" userId="517dc779ebbddcdf" providerId="LiveId" clId="{39E8B4CE-5C0D-480A-8585-284C13672A74}" dt="2026-04-02T09:35:39.470" v="45" actId="1076"/>
+          <ac:picMkLst>
+            <pc:docMk/>
+            <pc:sldMk cId="0" sldId="260"/>
+            <ac:picMk id="7" creationId="{E34D2802-BE2D-FE7B-DA93-618990DED957}"/>
+          </ac:picMkLst>
+        </pc:picChg>
+      </pc:sldChg>
+      <pc:sldChg chg="delSp modSp del mod">
+        <pc:chgData name="Alan Alvarado" userId="517dc779ebbddcdf" providerId="LiveId" clId="{39E8B4CE-5C0D-480A-8585-284C13672A74}" dt="2026-04-02T10:23:11.283" v="224" actId="2696"/>
+        <pc:sldMkLst>
+          <pc:docMk/>
+          <pc:sldMk cId="0" sldId="263"/>
+        </pc:sldMkLst>
+        <pc:spChg chg="del">
+          <ac:chgData name="Alan Alvarado" userId="517dc779ebbddcdf" providerId="LiveId" clId="{39E8B4CE-5C0D-480A-8585-284C13672A74}" dt="2026-04-02T10:19:55.914" v="58" actId="478"/>
+          <ac:spMkLst>
+            <pc:docMk/>
+            <pc:sldMk cId="0" sldId="263"/>
+            <ac:spMk id="4" creationId="{00000000-0000-0000-0000-000000000000}"/>
+          </ac:spMkLst>
+        </pc:spChg>
+        <pc:picChg chg="mod">
+          <ac:chgData name="Alan Alvarado" userId="517dc779ebbddcdf" providerId="LiveId" clId="{39E8B4CE-5C0D-480A-8585-284C13672A74}" dt="2026-04-02T10:21:14.726" v="75" actId="1076"/>
+          <ac:picMkLst>
+            <pc:docMk/>
+            <pc:sldMk cId="0" sldId="263"/>
+            <ac:picMk id="2" creationId="{00000000-0000-0000-0000-000000000000}"/>
+          </ac:picMkLst>
+        </pc:picChg>
+      </pc:sldChg>
+      <pc:sldChg chg="modSp mod">
+        <pc:chgData name="Alan Alvarado" userId="517dc779ebbddcdf" providerId="LiveId" clId="{39E8B4CE-5C0D-480A-8585-284C13672A74}" dt="2026-04-02T10:14:54.416" v="57" actId="20577"/>
+        <pc:sldMkLst>
+          <pc:docMk/>
+          <pc:sldMk cId="3650285061" sldId="269"/>
+        </pc:sldMkLst>
+        <pc:spChg chg="mod">
+          <ac:chgData name="Alan Alvarado" userId="517dc779ebbddcdf" providerId="LiveId" clId="{39E8B4CE-5C0D-480A-8585-284C13672A74}" dt="2026-04-02T10:14:54.416" v="57" actId="20577"/>
+          <ac:spMkLst>
+            <pc:docMk/>
+            <pc:sldMk cId="3650285061" sldId="269"/>
+            <ac:spMk id="5" creationId="{77F3737B-4CB0-F13B-3624-FA9D32525C59}"/>
+          </ac:spMkLst>
+        </pc:spChg>
+      </pc:sldChg>
+      <pc:sldChg chg="addSp delSp modSp add mod ord">
+        <pc:chgData name="Alan Alvarado" userId="517dc779ebbddcdf" providerId="LiveId" clId="{39E8B4CE-5C0D-480A-8585-284C13672A74}" dt="2026-04-02T10:23:19.127" v="227" actId="20577"/>
+        <pc:sldMkLst>
+          <pc:docMk/>
+          <pc:sldMk cId="1287694049" sldId="270"/>
+        </pc:sldMkLst>
+        <pc:spChg chg="add mod">
+          <ac:chgData name="Alan Alvarado" userId="517dc779ebbddcdf" providerId="LiveId" clId="{39E8B4CE-5C0D-480A-8585-284C13672A74}" dt="2026-04-02T10:21:07.045" v="74" actId="255"/>
+          <ac:spMkLst>
+            <pc:docMk/>
+            <pc:sldMk cId="1287694049" sldId="270"/>
+            <ac:spMk id="3" creationId="{06F7D28B-C520-0633-4FE6-4CFA0A9B9168}"/>
+          </ac:spMkLst>
+        </pc:spChg>
+        <pc:spChg chg="del mod">
+          <ac:chgData name="Alan Alvarado" userId="517dc779ebbddcdf" providerId="LiveId" clId="{39E8B4CE-5C0D-480A-8585-284C13672A74}" dt="2026-04-02T10:20:35.395" v="68" actId="478"/>
+          <ac:spMkLst>
+            <pc:docMk/>
+            <pc:sldMk cId="1287694049" sldId="270"/>
+            <ac:spMk id="4" creationId="{3444AE56-A533-C50B-33B9-253939B58E76}"/>
+          </ac:spMkLst>
+        </pc:spChg>
+        <pc:spChg chg="mod">
+          <ac:chgData name="Alan Alvarado" userId="517dc779ebbddcdf" providerId="LiveId" clId="{39E8B4CE-5C0D-480A-8585-284C13672A74}" dt="2026-04-02T10:23:19.127" v="227" actId="20577"/>
+          <ac:spMkLst>
+            <pc:docMk/>
+            <pc:sldMk cId="1287694049" sldId="270"/>
+            <ac:spMk id="5" creationId="{262E1A04-F616-3F58-627F-0D19538D6A7A}"/>
+          </ac:spMkLst>
+        </pc:spChg>
+        <pc:picChg chg="mod">
+          <ac:chgData name="Alan Alvarado" userId="517dc779ebbddcdf" providerId="LiveId" clId="{39E8B4CE-5C0D-480A-8585-284C13672A74}" dt="2026-04-02T10:22:49.573" v="220" actId="1076"/>
+          <ac:picMkLst>
+            <pc:docMk/>
+            <pc:sldMk cId="1287694049" sldId="270"/>
+            <ac:picMk id="2" creationId="{B6E2BCCC-DF2D-071A-A846-A40795BD1997}"/>
+          </ac:picMkLst>
+        </pc:picChg>
       </pc:sldChg>
     </pc:docChg>
   </pc:docChgLst>
@@ -516,7 +663,13 @@
   <p:cSld>
     <p:spTree>
       <p:nvGrpSpPr>
-        <p:cNvPr id="1" name=""/>
+        <p:cNvPr id="1" name="">
+          <a:extLst>
+            <a:ext uri="{FF2B5EF4-FFF2-40B4-BE49-F238E27FC236}">
+              <a16:creationId xmlns:a16="http://schemas.microsoft.com/office/drawing/2014/main" id="{D839B57F-A52C-219B-1D99-2001121FC1D1}"/>
+            </a:ext>
+          </a:extLst>
+        </p:cNvPr>
         <p:cNvGrpSpPr/>
         <p:nvPr/>
       </p:nvGrpSpPr>
@@ -530,7 +683,13 @@
       </p:grpSpPr>
       <p:sp>
         <p:nvSpPr>
-          <p:cNvPr id="2" name="Slide Image Placeholder 1"/>
+          <p:cNvPr id="2" name="Slide Image Placeholder 1">
+            <a:extLst>
+              <a:ext uri="{FF2B5EF4-FFF2-40B4-BE49-F238E27FC236}">
+                <a16:creationId xmlns:a16="http://schemas.microsoft.com/office/drawing/2014/main" id="{80B87190-7A35-A982-22E8-5EEACCED8B83}"/>
+              </a:ext>
+            </a:extLst>
+          </p:cNvPr>
           <p:cNvSpPr>
             <a:spLocks noGrp="1" noRot="1" noChangeAspect="1"/>
           </p:cNvSpPr>
@@ -542,7 +701,13 @@
       </p:sp>
       <p:sp>
         <p:nvSpPr>
-          <p:cNvPr id="3" name="Notes Placeholder 2"/>
+          <p:cNvPr id="3" name="Notes Placeholder 2">
+            <a:extLst>
+              <a:ext uri="{FF2B5EF4-FFF2-40B4-BE49-F238E27FC236}">
+                <a16:creationId xmlns:a16="http://schemas.microsoft.com/office/drawing/2014/main" id="{353F19B6-3F73-41C7-972B-FC58F5A10878}"/>
+              </a:ext>
+            </a:extLst>
+          </p:cNvPr>
           <p:cNvSpPr>
             <a:spLocks noGrp="1"/>
           </p:cNvSpPr>
@@ -556,29 +721,21 @@
           <a:lstStyle/>
           <a:p>
             <a:r>
-              <a:rPr lang="en-US" sz="1200" b="1" dirty="0">
-                <a:solidFill>
-                  <a:srgbClr val="000000"/>
-                </a:solidFill>
-                <a:latin typeface="Noto Sans KR" pitchFamily="34" charset="0"/>
-                <a:ea typeface="Noto Sans KR" pitchFamily="34" charset="-122"/>
-                <a:cs typeface="Noto Sans KR" pitchFamily="34" charset="-120"/>
-              </a:rPr>
-              <a:t>Public health campaigns should focus on building
-institutional trust through transparent communication and engagement with
-trusted community leaders. Clear, honest messaging and responsiveness to
-public concerns are more effective than monetary incentives for motivating
-hesitant populations. Financial incentives can complement
-trust-building efforts but should be secondary to credible communication
-strategies.</a:t>
-            </a:r>
-            <a:endParaRPr lang="en-US" dirty="0"/>
+              <a:rPr lang="en-US" dirty="0"/>
+              <a:t>I estimated two separate interaction regression models to examine predictors of vaccine hesitancy. In the first model, I included baseline attitudes, trust in government, and their interaction term, which allowed me to test both the direct effect of trust and whether trust modifies the relationship between baseline attitudes and vaccine hesitancy. The second model replicated the same structure but replaced trust with financial incentives, which served as a comparison variable based on the original study. This approach ensured consistency in model specification and allowed for a direct comparison between predictors. All key variables were standardized into z-scores, giving them a mean of 0 and a standard deviation of 1, which makes the coefficients interpretable as changes in vaccine hesitancy in standard deviation units and allows effect sizes to be directly compared across variables. I then compared the two models by examining the magnitude of the standardized coefficients, their statistical significance, and the strength of the interaction terms. The goal of this approach was to assess whether a psychological factor (trust in government) or a material factor (financial incentives) is more important in explaining variation in vaccine hesitancy, while also accounting for how these factors interact with baseline attitudes.</a:t>
+            </a:r>
           </a:p>
         </p:txBody>
       </p:sp>
       <p:sp>
         <p:nvSpPr>
-          <p:cNvPr id="4" name="Slide Number Placeholder 3"/>
+          <p:cNvPr id="4" name="Slide Number Placeholder 3">
+            <a:extLst>
+              <a:ext uri="{FF2B5EF4-FFF2-40B4-BE49-F238E27FC236}">
+                <a16:creationId xmlns:a16="http://schemas.microsoft.com/office/drawing/2014/main" id="{C6764CA6-DC2C-82E0-1186-F72444324DAE}"/>
+              </a:ext>
+            </a:extLst>
+          </p:cNvPr>
           <p:cNvSpPr>
             <a:spLocks noGrp="1"/>
           </p:cNvSpPr>
@@ -602,7 +759,7 @@
     </p:spTree>
     <p:extLst>
       <p:ext uri="{BB962C8B-B14F-4D97-AF65-F5344CB8AC3E}">
-        <p14:creationId xmlns:p14="http://schemas.microsoft.com/office/powerpoint/2010/main" val="1024086991"/>
+        <p14:creationId xmlns:p14="http://schemas.microsoft.com/office/powerpoint/2010/main" val="2320994088"/>
       </p:ext>
     </p:extLst>
   </p:cSld>
@@ -2179,10 +2336,16 @@
 
 <file path=ppt/slides/slide11.xml><?xml version="1.0" encoding="utf-8"?>
 <p:sld xmlns:a="http://schemas.openxmlformats.org/drawingml/2006/main" xmlns:r="http://schemas.openxmlformats.org/officeDocument/2006/relationships" xmlns:p="http://schemas.openxmlformats.org/presentationml/2006/main">
-  <p:cSld name="Slide 8">
+  <p:cSld>
     <p:spTree>
       <p:nvGrpSpPr>
-        <p:cNvPr id="1" name=""/>
+        <p:cNvPr id="1" name="">
+          <a:extLst>
+            <a:ext uri="{FF2B5EF4-FFF2-40B4-BE49-F238E27FC236}">
+              <a16:creationId xmlns:a16="http://schemas.microsoft.com/office/drawing/2014/main" id="{102AECA8-1C3C-6D2C-9151-3F5ED921B66E}"/>
+            </a:ext>
+          </a:extLst>
+        </p:cNvPr>
         <p:cNvGrpSpPr/>
         <p:nvPr/>
       </p:nvGrpSpPr>
@@ -2196,7 +2359,13 @@
       </p:grpSpPr>
       <p:pic>
         <p:nvPicPr>
-          <p:cNvPr id="2" name="Image 0" descr="preencoded.png"/>
+          <p:cNvPr id="2" name="Image 0" descr="preencoded.png">
+            <a:extLst>
+              <a:ext uri="{FF2B5EF4-FFF2-40B4-BE49-F238E27FC236}">
+                <a16:creationId xmlns:a16="http://schemas.microsoft.com/office/drawing/2014/main" id="{B6E2BCCC-DF2D-071A-A846-A40795BD1997}"/>
+              </a:ext>
+            </a:extLst>
+          </p:cNvPr>
           <p:cNvPicPr>
             <a:picLocks noChangeAspect="1"/>
           </p:cNvPicPr>
@@ -2210,7 +2379,7 @@
         </p:blipFill>
         <p:spPr>
           <a:xfrm>
-            <a:off x="0" y="0"/>
+            <a:off x="-94425" y="-881091"/>
             <a:ext cx="12192000" cy="6858000"/>
           </a:xfrm>
           <a:prstGeom prst="rect">
@@ -2220,258 +2389,406 @@
       </p:pic>
       <p:sp>
         <p:nvSpPr>
-          <p:cNvPr id="3" name="Text 0"/>
-          <p:cNvSpPr/>
+          <p:cNvPr id="5" name="Rectangle 1">
+            <a:extLst>
+              <a:ext uri="{FF2B5EF4-FFF2-40B4-BE49-F238E27FC236}">
+                <a16:creationId xmlns:a16="http://schemas.microsoft.com/office/drawing/2014/main" id="{262E1A04-F616-3F58-627F-0D19538D6A7A}"/>
+              </a:ext>
+            </a:extLst>
+          </p:cNvPr>
+          <p:cNvSpPr>
+            <a:spLocks noChangeArrowheads="1"/>
+          </p:cNvSpPr>
           <p:nvPr/>
         </p:nvSpPr>
-        <p:spPr>
+        <p:spPr bwMode="auto">
           <a:xfrm>
-            <a:off x="704850" y="400050"/>
-            <a:ext cx="19602450" cy="560040"/>
+            <a:off x="373225" y="1480479"/>
+            <a:ext cx="4758034" cy="2954655"/>
           </a:xfrm>
           <a:prstGeom prst="rect">
             <a:avLst/>
           </a:prstGeom>
           <a:noFill/>
-          <a:ln/>
+          <a:ln>
+            <a:noFill/>
+          </a:ln>
+          <a:effectLst/>
+          <a:extLst>
+            <a:ext uri="{909E8E84-426E-40DD-AFC4-6F175D3DCCD1}">
+              <a14:hiddenFill xmlns:a14="http://schemas.microsoft.com/office/drawing/2010/main">
+                <a:solidFill>
+                  <a:schemeClr val="accent1"/>
+                </a:solidFill>
+              </a14:hiddenFill>
+            </a:ext>
+            <a:ext uri="{91240B29-F687-4F45-9708-019B960494DF}">
+              <a14:hiddenLine xmlns:a14="http://schemas.microsoft.com/office/drawing/2010/main" w="9525">
+                <a:solidFill>
+                  <a:schemeClr val="tx1"/>
+                </a:solidFill>
+                <a:miter lim="800000"/>
+                <a:headEnd/>
+                <a:tailEnd/>
+              </a14:hiddenLine>
+            </a:ext>
+            <a:ext uri="{AF507438-7753-43E0-B8FC-AC1667EBCBE1}">
+              <a14:hiddenEffects xmlns:a14="http://schemas.microsoft.com/office/drawing/2010/main">
+                <a:effectLst>
+                  <a:outerShdw dist="35921" dir="2700000" algn="ctr" rotWithShape="0">
+                    <a:schemeClr val="bg2"/>
+                  </a:outerShdw>
+                </a:effectLst>
+              </a14:hiddenEffects>
+            </a:ext>
+          </a:extLst>
         </p:spPr>
         <p:txBody>
-          <a:bodyPr vert="horz" wrap="none" lIns="0" tIns="0" rIns="0" bIns="0" rtlCol="0" anchor="ctr"/>
+          <a:bodyPr vert="horz" wrap="none" lIns="91440" tIns="45720" rIns="91440" bIns="45720" numCol="1" anchor="ctr" anchorCtr="0" compatLnSpc="1">
+            <a:prstTxWarp prst="textNoShape">
+              <a:avLst/>
+            </a:prstTxWarp>
+            <a:spAutoFit/>
+          </a:bodyPr>
           <a:lstStyle/>
           <a:p>
-            <a:pPr marL="0" indent="0">
-              <a:lnSpc>
-                <a:spcPts val="4410"/>
-              </a:lnSpc>
+            <a:pPr marL="342900" marR="0" lvl="0" indent="-342900" algn="l" defTabSz="914400" rtl="0" eaLnBrk="0" fontAlgn="base" latinLnBrk="0" hangingPunct="0">
+              <a:lnSpc>
+                <a:spcPct val="100000"/>
+              </a:lnSpc>
+              <a:spcBef>
+                <a:spcPct val="0"/>
+              </a:spcBef>
+              <a:spcAft>
+                <a:spcPct val="0"/>
+              </a:spcAft>
+              <a:buClrTx/>
+              <a:buSzTx/>
+              <a:buAutoNum type="arabicPeriod"/>
+              <a:tabLst/>
+            </a:pPr>
+            <a:r>
+              <a:rPr kumimoji="0" lang="en-US" altLang="en-US" sz="2000" i="0" u="none" strike="noStrike" cap="none" normalizeH="0" baseline="0" dirty="0">
+                <a:ln>
+                  <a:noFill/>
+                </a:ln>
+                <a:solidFill>
+                  <a:schemeClr val="tx1"/>
+                </a:solidFill>
+                <a:effectLst/>
+                <a:latin typeface="Noto Sans" panose="020B0502040504020204" pitchFamily="34" charset="0"/>
+                <a:ea typeface="Noto Sans" panose="020B0502040504020204" pitchFamily="34" charset="0"/>
+                <a:cs typeface="Noto Sans" panose="020B0502040504020204" pitchFamily="34" charset="0"/>
+              </a:rPr>
+              <a:t>Prioritize Trust Building</a:t>
+            </a:r>
+          </a:p>
+          <a:p>
+            <a:pPr marR="0" lvl="0" algn="l" defTabSz="914400" rtl="0" eaLnBrk="0" fontAlgn="base" latinLnBrk="0" hangingPunct="0">
+              <a:lnSpc>
+                <a:spcPct val="100000"/>
+              </a:lnSpc>
+              <a:spcBef>
+                <a:spcPct val="0"/>
+              </a:spcBef>
+              <a:spcAft>
+                <a:spcPct val="0"/>
+              </a:spcAft>
+              <a:buClrTx/>
+              <a:buSzTx/>
+              <a:tabLst/>
+            </a:pPr>
+            <a:endParaRPr kumimoji="0" lang="en-US" altLang="en-US" sz="2000" i="0" u="none" strike="noStrike" cap="none" normalizeH="0" baseline="0" dirty="0">
+              <a:ln>
+                <a:noFill/>
+              </a:ln>
+              <a:solidFill>
+                <a:schemeClr val="tx1"/>
+              </a:solidFill>
+              <a:effectLst/>
+              <a:latin typeface="Noto Sans" panose="020B0502040504020204" pitchFamily="34" charset="0"/>
+              <a:ea typeface="Noto Sans" panose="020B0502040504020204" pitchFamily="34" charset="0"/>
+              <a:cs typeface="Noto Sans" panose="020B0502040504020204" pitchFamily="34" charset="0"/>
+            </a:endParaRPr>
+          </a:p>
+          <a:p>
+            <a:pPr marR="0" lvl="0" algn="l" defTabSz="914400" rtl="0" eaLnBrk="0" fontAlgn="base" latinLnBrk="0" hangingPunct="0">
+              <a:lnSpc>
+                <a:spcPct val="100000"/>
+              </a:lnSpc>
+              <a:spcBef>
+                <a:spcPct val="0"/>
+              </a:spcBef>
+              <a:spcAft>
+                <a:spcPct val="0"/>
+              </a:spcAft>
+              <a:buClrTx/>
+              <a:buSzTx/>
+              <a:tabLst/>
+            </a:pPr>
+            <a:endParaRPr kumimoji="0" lang="en-US" altLang="en-US" sz="2000" i="0" u="none" strike="noStrike" cap="none" normalizeH="0" baseline="0" dirty="0">
+              <a:ln>
+                <a:noFill/>
+              </a:ln>
+              <a:solidFill>
+                <a:schemeClr val="tx1"/>
+              </a:solidFill>
+              <a:effectLst/>
+              <a:latin typeface="Noto Sans" panose="020B0502040504020204" pitchFamily="34" charset="0"/>
+              <a:ea typeface="Noto Sans" panose="020B0502040504020204" pitchFamily="34" charset="0"/>
+              <a:cs typeface="Noto Sans" panose="020B0502040504020204" pitchFamily="34" charset="0"/>
+            </a:endParaRPr>
+          </a:p>
+          <a:p>
+            <a:pPr marR="0" lvl="0" algn="l" defTabSz="914400" rtl="0" eaLnBrk="0" fontAlgn="base" latinLnBrk="0" hangingPunct="0">
+              <a:lnSpc>
+                <a:spcPct val="100000"/>
+              </a:lnSpc>
+              <a:spcBef>
+                <a:spcPct val="0"/>
+              </a:spcBef>
+              <a:spcAft>
+                <a:spcPct val="0"/>
+              </a:spcAft>
+              <a:buClrTx/>
+              <a:buSzTx/>
+              <a:tabLst/>
+            </a:pPr>
+            <a:r>
+              <a:rPr kumimoji="0" lang="en-US" altLang="en-US" sz="2000" i="0" u="none" strike="noStrike" cap="none" normalizeH="0" baseline="0" dirty="0">
+                <a:ln>
+                  <a:noFill/>
+                </a:ln>
+                <a:solidFill>
+                  <a:schemeClr val="tx1"/>
+                </a:solidFill>
+                <a:effectLst/>
+                <a:latin typeface="Noto Sans" panose="020B0502040504020204" pitchFamily="34" charset="0"/>
+                <a:ea typeface="Noto Sans" panose="020B0502040504020204" pitchFamily="34" charset="0"/>
+                <a:cs typeface="Noto Sans" panose="020B0502040504020204" pitchFamily="34" charset="0"/>
+              </a:rPr>
+              <a:t>2.  Transparent Communication</a:t>
+            </a:r>
+          </a:p>
+          <a:p>
+            <a:pPr marR="0" lvl="0" algn="l" defTabSz="914400" rtl="0" eaLnBrk="0" fontAlgn="base" latinLnBrk="0" hangingPunct="0">
+              <a:lnSpc>
+                <a:spcPct val="100000"/>
+              </a:lnSpc>
+              <a:spcBef>
+                <a:spcPct val="0"/>
+              </a:spcBef>
+              <a:spcAft>
+                <a:spcPct val="0"/>
+              </a:spcAft>
+              <a:buClrTx/>
+              <a:buSzTx/>
+              <a:tabLst/>
+            </a:pPr>
+            <a:endParaRPr lang="en-US" altLang="en-US" sz="2000" dirty="0">
+              <a:latin typeface="Noto Sans" panose="020B0502040504020204" pitchFamily="34" charset="0"/>
+              <a:ea typeface="Noto Sans" panose="020B0502040504020204" pitchFamily="34" charset="0"/>
+              <a:cs typeface="Noto Sans" panose="020B0502040504020204" pitchFamily="34" charset="0"/>
+            </a:endParaRPr>
+          </a:p>
+          <a:p>
+            <a:pPr marR="0" lvl="0" algn="l" defTabSz="914400" rtl="0" eaLnBrk="0" fontAlgn="base" latinLnBrk="0" hangingPunct="0">
+              <a:lnSpc>
+                <a:spcPct val="100000"/>
+              </a:lnSpc>
+              <a:spcBef>
+                <a:spcPct val="0"/>
+              </a:spcBef>
+              <a:spcAft>
+                <a:spcPct val="0"/>
+              </a:spcAft>
+              <a:buClrTx/>
+              <a:buSzTx/>
+              <a:tabLst/>
+            </a:pPr>
+            <a:endParaRPr lang="en-US" altLang="en-US" sz="2000" dirty="0">
+              <a:latin typeface="Noto Sans" panose="020B0502040504020204" pitchFamily="34" charset="0"/>
+              <a:ea typeface="Noto Sans" panose="020B0502040504020204" pitchFamily="34" charset="0"/>
+              <a:cs typeface="Noto Sans" panose="020B0502040504020204" pitchFamily="34" charset="0"/>
+            </a:endParaRPr>
+          </a:p>
+          <a:p>
+            <a:pPr marR="0" lvl="0" algn="l" defTabSz="914400" rtl="0" eaLnBrk="0" fontAlgn="base" latinLnBrk="0" hangingPunct="0">
+              <a:lnSpc>
+                <a:spcPct val="100000"/>
+              </a:lnSpc>
+              <a:spcBef>
+                <a:spcPct val="0"/>
+              </a:spcBef>
+              <a:spcAft>
+                <a:spcPct val="0"/>
+              </a:spcAft>
+              <a:buClrTx/>
+              <a:buSzTx/>
+              <a:tabLst/>
+            </a:pPr>
+            <a:r>
+              <a:rPr lang="en-US" altLang="en-US" sz="2000" dirty="0">
+                <a:latin typeface="Noto Sans" panose="020B0502040504020204" pitchFamily="34" charset="0"/>
+                <a:ea typeface="Noto Sans" panose="020B0502040504020204" pitchFamily="34" charset="0"/>
+                <a:cs typeface="Noto Sans" panose="020B0502040504020204" pitchFamily="34" charset="0"/>
+              </a:rPr>
+              <a:t>3. Strategic use of </a:t>
+            </a:r>
+            <a:r>
+              <a:rPr kumimoji="0" lang="en-US" altLang="en-US" sz="2000" i="0" u="none" strike="noStrike" cap="none" normalizeH="0" baseline="0" dirty="0">
+                <a:ln>
+                  <a:noFill/>
+                </a:ln>
+                <a:solidFill>
+                  <a:schemeClr val="tx1"/>
+                </a:solidFill>
+                <a:effectLst/>
+                <a:latin typeface="Noto Sans" panose="020B0502040504020204" pitchFamily="34" charset="0"/>
+                <a:ea typeface="Noto Sans" panose="020B0502040504020204" pitchFamily="34" charset="0"/>
+                <a:cs typeface="Noto Sans" panose="020B0502040504020204" pitchFamily="34" charset="0"/>
+              </a:rPr>
+              <a:t>financial incentives </a:t>
+            </a:r>
+          </a:p>
+          <a:p>
+            <a:pPr marL="342900" marR="0" lvl="0" indent="-342900" algn="l" defTabSz="914400" rtl="0" eaLnBrk="0" fontAlgn="base" latinLnBrk="0" hangingPunct="0">
+              <a:lnSpc>
+                <a:spcPct val="100000"/>
+              </a:lnSpc>
+              <a:spcBef>
+                <a:spcPct val="0"/>
+              </a:spcBef>
+              <a:spcAft>
+                <a:spcPct val="0"/>
+              </a:spcAft>
+              <a:buClrTx/>
+              <a:buSzTx/>
+              <a:buAutoNum type="arabicPeriod"/>
+              <a:tabLst/>
+            </a:pPr>
+            <a:endParaRPr kumimoji="0" lang="en-US" altLang="en-US" sz="1400" i="0" u="none" strike="noStrike" cap="none" normalizeH="0" baseline="0" dirty="0">
+              <a:ln>
+                <a:noFill/>
+              </a:ln>
+              <a:solidFill>
+                <a:schemeClr val="tx1"/>
+              </a:solidFill>
+              <a:effectLst/>
+              <a:latin typeface="Arial" panose="020B0604020202020204" pitchFamily="34" charset="0"/>
+            </a:endParaRPr>
+          </a:p>
+          <a:p>
+            <a:pPr marL="342900" marR="0" lvl="0" indent="-342900" algn="l" defTabSz="914400" rtl="0" eaLnBrk="0" fontAlgn="base" latinLnBrk="0" hangingPunct="0">
+              <a:lnSpc>
+                <a:spcPct val="100000"/>
+              </a:lnSpc>
+              <a:spcBef>
+                <a:spcPct val="0"/>
+              </a:spcBef>
+              <a:spcAft>
+                <a:spcPct val="0"/>
+              </a:spcAft>
+              <a:buClrTx/>
+              <a:buSzTx/>
+              <a:buAutoNum type="arabicPeriod"/>
+              <a:tabLst/>
+            </a:pPr>
+            <a:endParaRPr kumimoji="0" lang="en-US" altLang="en-US" sz="1400" i="0" u="none" strike="noStrike" cap="none" normalizeH="0" baseline="0" dirty="0">
+              <a:ln>
+                <a:noFill/>
+              </a:ln>
+              <a:solidFill>
+                <a:schemeClr val="tx1"/>
+              </a:solidFill>
+              <a:effectLst/>
+              <a:latin typeface="Arial" panose="020B0604020202020204" pitchFamily="34" charset="0"/>
+            </a:endParaRPr>
+          </a:p>
+          <a:p>
+            <a:pPr marL="0" marR="0" lvl="0" indent="0" algn="l" defTabSz="914400" rtl="0" eaLnBrk="0" fontAlgn="base" latinLnBrk="0" hangingPunct="0">
+              <a:lnSpc>
+                <a:spcPct val="100000"/>
+              </a:lnSpc>
+              <a:spcBef>
+                <a:spcPct val="0"/>
+              </a:spcBef>
+              <a:spcAft>
+                <a:spcPct val="0"/>
+              </a:spcAft>
+              <a:buClrTx/>
+              <a:buSzTx/>
+              <a:buFontTx/>
               <a:buNone/>
-            </a:pPr>
-            <a:r>
-              <a:rPr lang="en-US" sz="3675" b="1" dirty="0">
-                <a:solidFill>
-                  <a:srgbClr val="25324A"/>
-                </a:solidFill>
-                <a:latin typeface="Hubot Sans" pitchFamily="34" charset="0"/>
-                <a:ea typeface="Hubot Sans" pitchFamily="34" charset="-122"/>
-                <a:cs typeface="Hubot Sans" pitchFamily="34" charset="-120"/>
-              </a:rPr>
-              <a:t>Policy Implications and Conclusions</a:t>
-            </a:r>
-            <a:endParaRPr lang="en-US" sz="3675" dirty="0"/>
+              <a:tabLst/>
+            </a:pPr>
+            <a:endParaRPr kumimoji="0" lang="en-US" altLang="en-US" sz="1800" b="0" i="0" u="none" strike="noStrike" cap="none" normalizeH="0" baseline="0" dirty="0">
+              <a:ln>
+                <a:noFill/>
+              </a:ln>
+              <a:solidFill>
+                <a:schemeClr val="tx1"/>
+              </a:solidFill>
+              <a:effectLst/>
+              <a:latin typeface="Arial" panose="020B0604020202020204" pitchFamily="34" charset="0"/>
+            </a:endParaRPr>
           </a:p>
         </p:txBody>
       </p:sp>
       <p:sp>
         <p:nvSpPr>
-          <p:cNvPr id="4" name="Text 1"/>
-          <p:cNvSpPr/>
+          <p:cNvPr id="3" name="TextBox 2">
+            <a:extLst>
+              <a:ext uri="{FF2B5EF4-FFF2-40B4-BE49-F238E27FC236}">
+                <a16:creationId xmlns:a16="http://schemas.microsoft.com/office/drawing/2014/main" id="{06F7D28B-C520-0633-4FE6-4CFA0A9B9168}"/>
+              </a:ext>
+            </a:extLst>
+          </p:cNvPr>
+          <p:cNvSpPr txBox="1"/>
           <p:nvPr/>
         </p:nvSpPr>
         <p:spPr>
           <a:xfrm>
-            <a:off x="1019175" y="1714500"/>
-            <a:ext cx="11064180" cy="693539"/>
+            <a:off x="491612" y="-110461"/>
+            <a:ext cx="8454430" cy="637419"/>
           </a:xfrm>
           <a:prstGeom prst="rect">
             <a:avLst/>
           </a:prstGeom>
           <a:noFill/>
-          <a:ln/>
         </p:spPr>
         <p:txBody>
-          <a:bodyPr vert="horz" wrap="none" lIns="0" tIns="0" rIns="0" bIns="0" rtlCol="0" anchor="ctr"/>
+          <a:bodyPr wrap="square" rtlCol="0">
+            <a:spAutoFit/>
+          </a:bodyPr>
           <a:lstStyle/>
           <a:p>
-            <a:pPr marL="0" indent="0">
-              <a:lnSpc>
-                <a:spcPts val="2730"/>
-              </a:lnSpc>
-              <a:buNone/>
-            </a:pPr>
-            <a:r>
-              <a:rPr lang="en-US" sz="2100" b="1" dirty="0">
-                <a:solidFill>
-                  <a:srgbClr val="000000"/>
-                </a:solidFill>
-                <a:latin typeface="Noto Sans KR" pitchFamily="34" charset="0"/>
-                <a:ea typeface="Noto Sans KR" pitchFamily="34" charset="-122"/>
-                <a:cs typeface="Noto Sans KR" pitchFamily="34" charset="-120"/>
-              </a:rPr>
-              <a:t>Trust increases vaccination willingness by 0.0187 units (p &lt; 2e-16) vs.
-0.0111 units for financial incentives (p &lt; 2e-16) — a 69% stronger effect.</a:t>
-            </a:r>
-            <a:endParaRPr lang="en-US" sz="2100" dirty="0"/>
+            <a:pPr>
+              <a:lnSpc>
+                <a:spcPts val="4410"/>
+              </a:lnSpc>
+            </a:pPr>
+            <a:r>
+              <a:rPr lang="en-US" sz="3600" b="1" dirty="0">
+                <a:solidFill>
+                  <a:srgbClr val="25324A"/>
+                </a:solidFill>
+                <a:latin typeface="Hubot Sans" pitchFamily="34" charset="0"/>
+                <a:ea typeface="Hubot Sans" pitchFamily="34" charset="-122"/>
+                <a:cs typeface="Hubot Sans" pitchFamily="34" charset="-120"/>
+              </a:rPr>
+              <a:t>Policy Implications and Conclusions</a:t>
+            </a:r>
+            <a:endParaRPr lang="en-US" sz="3600" dirty="0"/>
           </a:p>
         </p:txBody>
       </p:sp>
-      <p:sp>
-        <p:nvSpPr>
-          <p:cNvPr id="5" name="Text 2"/>
-          <p:cNvSpPr/>
-          <p:nvPr/>
-        </p:nvSpPr>
-        <p:spPr>
-          <a:xfrm>
-            <a:off x="714375" y="2867025"/>
-            <a:ext cx="11933783" cy="1040309"/>
-          </a:xfrm>
-          <a:prstGeom prst="rect">
-            <a:avLst/>
-          </a:prstGeom>
-          <a:noFill/>
-          <a:ln/>
-        </p:spPr>
-        <p:txBody>
-          <a:bodyPr vert="horz" wrap="none" lIns="0" tIns="0" rIns="0" bIns="0" rtlCol="0" anchor="ctr"/>
-          <a:lstStyle/>
-          <a:p>
-            <a:pPr marL="0" indent="0">
-              <a:lnSpc>
-                <a:spcPts val="2730"/>
-              </a:lnSpc>
-              <a:buNone/>
-            </a:pPr>
-            <a:r>
-              <a:rPr lang="en-US" sz="2100" b="1" dirty="0">
-                <a:solidFill>
-                  <a:srgbClr val="000000"/>
-                </a:solidFill>
-                <a:latin typeface="Noto Sans KR" pitchFamily="34" charset="0"/>
-                <a:ea typeface="Noto Sans KR" pitchFamily="34" charset="-122"/>
-                <a:cs typeface="Noto Sans KR" pitchFamily="34" charset="-120"/>
-              </a:rPr>
-              <a:t>1. Prioritize trust-building</a:t>
-            </a:r>
-            <a:endParaRPr lang="en-US" sz="2100" dirty="0"/>
-          </a:p>
-        </p:txBody>
-      </p:sp>
-      <p:sp>
-        <p:nvSpPr>
-          <p:cNvPr id="6" name="Text 3"/>
-          <p:cNvSpPr/>
-          <p:nvPr/>
-        </p:nvSpPr>
-        <p:spPr>
-          <a:xfrm>
-            <a:off x="714375" y="4000500"/>
-            <a:ext cx="12195721" cy="1040309"/>
-          </a:xfrm>
-          <a:prstGeom prst="rect">
-            <a:avLst/>
-          </a:prstGeom>
-          <a:noFill/>
-          <a:ln/>
-        </p:spPr>
-        <p:txBody>
-          <a:bodyPr vert="horz" wrap="none" lIns="0" tIns="0" rIns="0" bIns="0" rtlCol="0" anchor="ctr"/>
-          <a:lstStyle/>
-          <a:p>
-            <a:pPr marL="0" indent="0">
-              <a:lnSpc>
-                <a:spcPts val="2730"/>
-              </a:lnSpc>
-              <a:buNone/>
-            </a:pPr>
-            <a:r>
-              <a:rPr lang="en-US" sz="2100" b="1" dirty="0">
-                <a:solidFill>
-                  <a:srgbClr val="000000"/>
-                </a:solidFill>
-                <a:latin typeface="Noto Sans KR" pitchFamily="34" charset="0"/>
-                <a:ea typeface="Noto Sans KR" pitchFamily="34" charset="-122"/>
-                <a:cs typeface="Noto Sans KR" pitchFamily="34" charset="-120"/>
-              </a:rPr>
-              <a:t>2. Transparent communication</a:t>
-            </a:r>
-            <a:endParaRPr lang="en-US" sz="2100" dirty="0"/>
-          </a:p>
-        </p:txBody>
-      </p:sp>
-      <p:sp>
-        <p:nvSpPr>
-          <p:cNvPr id="7" name="Text 4"/>
-          <p:cNvSpPr/>
-          <p:nvPr/>
-        </p:nvSpPr>
-        <p:spPr>
-          <a:xfrm>
-            <a:off x="714375" y="5114925"/>
-            <a:ext cx="11797605" cy="1040309"/>
-          </a:xfrm>
-          <a:prstGeom prst="rect">
-            <a:avLst/>
-          </a:prstGeom>
-          <a:noFill/>
-          <a:ln/>
-        </p:spPr>
-        <p:txBody>
-          <a:bodyPr vert="horz" wrap="none" lIns="0" tIns="0" rIns="0" bIns="0" rtlCol="0" anchor="ctr"/>
-          <a:lstStyle/>
-          <a:p>
-            <a:pPr marL="0" indent="0">
-              <a:lnSpc>
-                <a:spcPts val="2730"/>
-              </a:lnSpc>
-              <a:buNone/>
-            </a:pPr>
-            <a:r>
-              <a:rPr lang="en-US" sz="2100" b="1" dirty="0">
-                <a:solidFill>
-                  <a:srgbClr val="000000"/>
-                </a:solidFill>
-                <a:latin typeface="Noto Sans KR" pitchFamily="34" charset="0"/>
-                <a:ea typeface="Noto Sans KR" pitchFamily="34" charset="-122"/>
-                <a:cs typeface="Noto Sans KR" pitchFamily="34" charset="-120"/>
-              </a:rPr>
-              <a:t>3. Strategic use of financial incentives</a:t>
-            </a:r>
-            <a:endParaRPr lang="en-US" sz="2100" dirty="0"/>
-          </a:p>
-        </p:txBody>
-      </p:sp>
-      <p:sp>
-        <p:nvSpPr>
-          <p:cNvPr id="8" name="Text 5"/>
-          <p:cNvSpPr/>
-          <p:nvPr/>
-        </p:nvSpPr>
-        <p:spPr>
-          <a:xfrm>
-            <a:off x="11595646" y="6543675"/>
-            <a:ext cx="419100" cy="209550"/>
-          </a:xfrm>
-          <a:prstGeom prst="rect">
-            <a:avLst/>
-          </a:prstGeom>
-          <a:noFill/>
-          <a:ln/>
-        </p:spPr>
-        <p:txBody>
-          <a:bodyPr vert="horz" wrap="none" lIns="0" tIns="0" rIns="0" bIns="0" rtlCol="0" anchor="ctr"/>
-          <a:lstStyle/>
-          <a:p>
-            <a:pPr marL="0" indent="0" algn="r">
-              <a:lnSpc>
-                <a:spcPts val="1650"/>
-              </a:lnSpc>
-              <a:buNone/>
-            </a:pPr>
-            <a:r>
-              <a:rPr lang="en-US" sz="1650" dirty="0">
-                <a:solidFill>
-                  <a:srgbClr val="9E9E9E"/>
-                </a:solidFill>
-                <a:latin typeface="Noto Sans KR" pitchFamily="34" charset="0"/>
-                <a:ea typeface="Noto Sans KR" pitchFamily="34" charset="-122"/>
-                <a:cs typeface="Noto Sans KR" pitchFamily="34" charset="-120"/>
-              </a:rPr>
-              <a:t>8</a:t>
-            </a:r>
-            <a:endParaRPr lang="en-US" sz="1650" dirty="0"/>
-          </a:p>
-        </p:txBody>
-      </p:sp>
     </p:spTree>
+    <p:extLst>
+      <p:ext uri="{BB962C8B-B14F-4D97-AF65-F5344CB8AC3E}">
+        <p14:creationId xmlns:p14="http://schemas.microsoft.com/office/powerpoint/2010/main" val="1287694049"/>
+      </p:ext>
+    </p:extLst>
   </p:cSld>
   <p:clrMapOvr>
     <a:masterClrMapping/>
@@ -2512,7 +2829,7 @@
         </p:blipFill>
         <p:spPr>
           <a:xfrm>
-            <a:off x="0" y="0"/>
+            <a:off x="0" y="-23217"/>
             <a:ext cx="12192000" cy="6858000"/>
           </a:xfrm>
           <a:prstGeom prst="rect">
@@ -2767,7 +3084,7 @@
                 <a:ea typeface="Noto Sans" pitchFamily="34" charset="-122"/>
                 <a:cs typeface="Noto Sans" pitchFamily="34" charset="-120"/>
               </a:rPr>
-              <a:t>– Enhanced freedoms for vaccinated individuals ( traveling, events, etc.)</a:t>
+              <a:t>– Enhanced freedoms for vaccinated individuals </a:t>
             </a:r>
             <a:endParaRPr lang="en-US" sz="2550" dirty="0"/>
           </a:p>
@@ -3574,10 +3891,10 @@
       </p:sp>
       <p:pic>
         <p:nvPicPr>
-          <p:cNvPr id="9" name="Picture 8">
+          <p:cNvPr id="6" name="Picture 5">
             <a:extLst>
               <a:ext uri="{FF2B5EF4-FFF2-40B4-BE49-F238E27FC236}">
-                <a16:creationId xmlns:a16="http://schemas.microsoft.com/office/drawing/2014/main" id="{BA7DAE05-EE5D-D908-F59D-448562A44209}"/>
+                <a16:creationId xmlns:a16="http://schemas.microsoft.com/office/drawing/2014/main" id="{F00C472A-0DE9-BCEE-1B1A-E45057E37189}"/>
               </a:ext>
             </a:extLst>
           </p:cNvPr>
@@ -3594,8 +3911,8 @@
         </p:blipFill>
         <p:spPr>
           <a:xfrm>
-            <a:off x="590549" y="2059462"/>
-            <a:ext cx="11067833" cy="2912588"/>
+            <a:off x="422030" y="2149972"/>
+            <a:ext cx="10865618" cy="3976537"/>
           </a:xfrm>
           <a:prstGeom prst="rect">
             <a:avLst/>
@@ -3651,30 +3968,6 @@
           </a:prstGeom>
         </p:spPr>
       </p:pic>
-      <p:pic>
-        <p:nvPicPr>
-          <p:cNvPr id="3" name="Image 1" descr="preencoded.png"/>
-          <p:cNvPicPr>
-            <a:picLocks noChangeAspect="1"/>
-          </p:cNvPicPr>
-          <p:nvPr/>
-        </p:nvPicPr>
-        <p:blipFill>
-          <a:blip r:embed="rId4"/>
-          <a:stretch>
-            <a:fillRect/>
-          </a:stretch>
-        </p:blipFill>
-        <p:spPr>
-          <a:xfrm>
-            <a:off x="524173" y="2578596"/>
-            <a:ext cx="5291286" cy="2928342"/>
-          </a:xfrm>
-          <a:prstGeom prst="rect">
-            <a:avLst/>
-          </a:prstGeom>
-        </p:spPr>
-      </p:pic>
       <p:sp>
         <p:nvSpPr>
           <p:cNvPr id="4" name="Text 0"/>
@@ -3766,6 +4059,36 @@
             <a:extLst>
               <a:ext uri="{FF2B5EF4-FFF2-40B4-BE49-F238E27FC236}">
                 <a16:creationId xmlns:a16="http://schemas.microsoft.com/office/drawing/2014/main" id="{4F8F5605-63ED-13DF-001D-BC1FE645D107}"/>
+              </a:ext>
+            </a:extLst>
+          </p:cNvPr>
+          <p:cNvPicPr>
+            <a:picLocks noChangeAspect="1"/>
+          </p:cNvPicPr>
+          <p:nvPr/>
+        </p:nvPicPr>
+        <p:blipFill>
+          <a:blip r:embed="rId4"/>
+          <a:stretch>
+            <a:fillRect/>
+          </a:stretch>
+        </p:blipFill>
+        <p:spPr>
+          <a:xfrm>
+            <a:off x="6472684" y="1628187"/>
+            <a:ext cx="5486411" cy="4572009"/>
+          </a:xfrm>
+          <a:prstGeom prst="rect">
+            <a:avLst/>
+          </a:prstGeom>
+        </p:spPr>
+      </p:pic>
+      <p:pic>
+        <p:nvPicPr>
+          <p:cNvPr id="7" name="Picture 6">
+            <a:extLst>
+              <a:ext uri="{FF2B5EF4-FFF2-40B4-BE49-F238E27FC236}">
+                <a16:creationId xmlns:a16="http://schemas.microsoft.com/office/drawing/2014/main" id="{E34D2802-BE2D-FE7B-DA93-618990DED957}"/>
               </a:ext>
             </a:extLst>
           </p:cNvPr>
@@ -3782,8 +4105,8 @@
         </p:blipFill>
         <p:spPr>
           <a:xfrm>
-            <a:off x="6472684" y="1628187"/>
-            <a:ext cx="5486411" cy="4572009"/>
+            <a:off x="71410" y="2554963"/>
+            <a:ext cx="5805224" cy="3252868"/>
           </a:xfrm>
           <a:prstGeom prst="rect">
             <a:avLst/>
@@ -5135,7 +5458,7 @@
                 <a:ea typeface="Noto Sans S Chinese Regular Regular 6" pitchFamily="34" charset="-122"/>
                 <a:cs typeface="Noto Sans S Chinese Regular Regular 6" pitchFamily="34" charset="-120"/>
               </a:rPr>
-              <a:t>  All variables standardized (z scores) </a:t>
+              <a:t>  All variables standardized</a:t>
             </a:r>
           </a:p>
           <a:p>
